--- a/양식/사진폼.pptx
+++ b/양식/사진폼.pptx
@@ -106,7 +106,7 @@
   </p:defaultTextStyle>
   <p:extLst>
     <p:ext uri="{EFAFB233-063F-42B5-8137-9DF3F51BA10A}">
-      <p15:sldGuideLst xmlns="" xmlns:p15="http://schemas.microsoft.com/office/powerpoint/2012/main">
+      <p15:sldGuideLst xmlns:p15="http://schemas.microsoft.com/office/powerpoint/2012/main" xmlns="">
         <p15:guide id="1" orient="horz" pos="3120">
           <p15:clr>
             <a:srgbClr val="A4A3A4"/>
@@ -304,7 +304,7 @@
           <a:p>
             <a:fld id="{0C303903-F653-4C89-995E-2E3561D73305}" type="datetimeFigureOut">
               <a:rPr lang="ko-KR" altLang="en-US" smtClean="0"/>
-              <a:t>2026-04-18</a:t>
+              <a:t>2026-05-23</a:t>
             </a:fld>
             <a:endParaRPr lang="ko-KR" altLang="en-US"/>
           </a:p>
@@ -474,7 +474,7 @@
           <a:p>
             <a:fld id="{0C303903-F653-4C89-995E-2E3561D73305}" type="datetimeFigureOut">
               <a:rPr lang="ko-KR" altLang="en-US" smtClean="0"/>
-              <a:t>2026-04-18</a:t>
+              <a:t>2026-05-23</a:t>
             </a:fld>
             <a:endParaRPr lang="ko-KR" altLang="en-US"/>
           </a:p>
@@ -654,7 +654,7 @@
           <a:p>
             <a:fld id="{0C303903-F653-4C89-995E-2E3561D73305}" type="datetimeFigureOut">
               <a:rPr lang="ko-KR" altLang="en-US" smtClean="0"/>
-              <a:t>2026-04-18</a:t>
+              <a:t>2026-05-23</a:t>
             </a:fld>
             <a:endParaRPr lang="ko-KR" altLang="en-US"/>
           </a:p>
@@ -824,7 +824,7 @@
           <a:p>
             <a:fld id="{0C303903-F653-4C89-995E-2E3561D73305}" type="datetimeFigureOut">
               <a:rPr lang="ko-KR" altLang="en-US" smtClean="0"/>
-              <a:t>2026-04-18</a:t>
+              <a:t>2026-05-23</a:t>
             </a:fld>
             <a:endParaRPr lang="ko-KR" altLang="en-US"/>
           </a:p>
@@ -1070,7 +1070,7 @@
           <a:p>
             <a:fld id="{0C303903-F653-4C89-995E-2E3561D73305}" type="datetimeFigureOut">
               <a:rPr lang="ko-KR" altLang="en-US" smtClean="0"/>
-              <a:t>2026-04-18</a:t>
+              <a:t>2026-05-23</a:t>
             </a:fld>
             <a:endParaRPr lang="ko-KR" altLang="en-US"/>
           </a:p>
@@ -1358,7 +1358,7 @@
           <a:p>
             <a:fld id="{0C303903-F653-4C89-995E-2E3561D73305}" type="datetimeFigureOut">
               <a:rPr lang="ko-KR" altLang="en-US" smtClean="0"/>
-              <a:t>2026-04-18</a:t>
+              <a:t>2026-05-23</a:t>
             </a:fld>
             <a:endParaRPr lang="ko-KR" altLang="en-US"/>
           </a:p>
@@ -1785,7 +1785,7 @@
           <a:p>
             <a:fld id="{0C303903-F653-4C89-995E-2E3561D73305}" type="datetimeFigureOut">
               <a:rPr lang="ko-KR" altLang="en-US" smtClean="0"/>
-              <a:t>2026-04-18</a:t>
+              <a:t>2026-05-23</a:t>
             </a:fld>
             <a:endParaRPr lang="ko-KR" altLang="en-US"/>
           </a:p>
@@ -1903,7 +1903,7 @@
           <a:p>
             <a:fld id="{0C303903-F653-4C89-995E-2E3561D73305}" type="datetimeFigureOut">
               <a:rPr lang="ko-KR" altLang="en-US" smtClean="0"/>
-              <a:t>2026-04-18</a:t>
+              <a:t>2026-05-23</a:t>
             </a:fld>
             <a:endParaRPr lang="ko-KR" altLang="en-US"/>
           </a:p>
@@ -1998,7 +1998,7 @@
           <a:p>
             <a:fld id="{0C303903-F653-4C89-995E-2E3561D73305}" type="datetimeFigureOut">
               <a:rPr lang="ko-KR" altLang="en-US" smtClean="0"/>
-              <a:t>2026-04-18</a:t>
+              <a:t>2026-05-23</a:t>
             </a:fld>
             <a:endParaRPr lang="ko-KR" altLang="en-US"/>
           </a:p>
@@ -2275,7 +2275,7 @@
           <a:p>
             <a:fld id="{0C303903-F653-4C89-995E-2E3561D73305}" type="datetimeFigureOut">
               <a:rPr lang="ko-KR" altLang="en-US" smtClean="0"/>
-              <a:t>2026-04-18</a:t>
+              <a:t>2026-05-23</a:t>
             </a:fld>
             <a:endParaRPr lang="ko-KR" altLang="en-US"/>
           </a:p>
@@ -2528,7 +2528,7 @@
           <a:p>
             <a:fld id="{0C303903-F653-4C89-995E-2E3561D73305}" type="datetimeFigureOut">
               <a:rPr lang="ko-KR" altLang="en-US" smtClean="0"/>
-              <a:t>2026-04-18</a:t>
+              <a:t>2026-05-23</a:t>
             </a:fld>
             <a:endParaRPr lang="ko-KR" altLang="en-US"/>
           </a:p>
@@ -2741,7 +2741,7 @@
           <a:p>
             <a:fld id="{0C303903-F653-4C89-995E-2E3561D73305}" type="datetimeFigureOut">
               <a:rPr lang="ko-KR" altLang="en-US" smtClean="0"/>
-              <a:t>2026-04-18</a:t>
+              <a:t>2026-05-23</a:t>
             </a:fld>
             <a:endParaRPr lang="ko-KR" altLang="en-US"/>
           </a:p>
@@ -3163,7 +3163,7 @@
         </p:nvSpPr>
         <p:spPr>
           <a:xfrm>
-            <a:off x="3818695" y="344488"/>
+            <a:off x="3861048" y="344488"/>
             <a:ext cx="2058577" cy="369332"/>
           </a:xfrm>
           <a:prstGeom prst="rect">
@@ -3179,7 +3179,7 @@
           <a:p>
             <a:r>
               <a:rPr lang="ko-KR" altLang="en-US" b="1" dirty="0" smtClean="0"/>
-              <a:t>강원지사</a:t>
+              <a:t>호남지사</a:t>
             </a:r>
             <a:r>
               <a:rPr lang="ko-KR" altLang="en-US" dirty="0" smtClean="0"/>
